--- a/ppt/out/WLC2급_제03강_웰빙·웰다잉·엔딩의통합철학과삶의설계.pptx
+++ b/ppt/out/WLC2급_제03강_웰빙·웰다잉·엔딩의통합철학과삶의설계.pptx
@@ -162,7 +162,7 @@
   <p:extLst>
     <p:ext uri="{521415D9-36F7-43E2-AB2F-B90AF26B5E84}">
       <p14:sectionLst xmlns:p14="http://schemas.microsoft.com/office/powerpoint/2010/main">
-        <p14:section name="열기" id="{5f268aee-66e1-f055-d62a-d1e0d6a5071d}">
+        <p14:section name="열기" id="{ea99fcc2-c756-4011-e0fe-124fc50c23f0}">
           <p14:sldIdLst>
             <p14:sldId id="256"/>
             <p14:sldId id="257"/>
@@ -175,7 +175,7 @@
             <p14:sldId id="264"/>
           </p14:sldIdLst>
         </p14:section>
-        <p14:section name="1교시 삶을 다시 읽다" id="{46105307-f25f-a2bf-81ee-6a6a661e7fcc}">
+        <p14:section name="1교시 삶을 다시 읽다" id="{7918da37-e9b9-eefe-305b-d24476bb929a}">
           <p14:sldIdLst>
             <p14:sldId id="265"/>
             <p14:sldId id="266"/>
@@ -189,7 +189,7 @@
             <p14:sldId id="274"/>
           </p14:sldIdLst>
         </p14:section>
-        <p14:section name="2교시 후회에서 설계로" id="{674da36d-587f-bad8-4248-92b9a83c258e}">
+        <p14:section name="2교시 후회에서 설계로" id="{8f091cbc-af66-0195-58f5-9b526f54e92e}">
           <p14:sldIdLst>
             <p14:sldId id="275"/>
             <p14:sldId id="276"/>
@@ -208,7 +208,7 @@
             <p14:sldId id="289"/>
           </p14:sldIdLst>
         </p14:section>
-        <p14:section name="3교시 나의 남은 삶 설계" id="{f4aa57a7-9054-e33a-96aa-39c4ba69d715}">
+        <p14:section name="3교시 나의 남은 삶 설계" id="{e1d00015-9c0f-1013-fe34-c09ae5f6dfca}">
           <p14:sldIdLst>
             <p14:sldId id="290"/>
             <p14:sldId id="291"/>
@@ -228,7 +228,7 @@
             <p14:sldId id="305"/>
           </p14:sldIdLst>
         </p14:section>
-        <p14:section name="정리와 예고" id="{756bdfc6-f262-310d-0352-fd88f704b544}">
+        <p14:section name="정리와 예고" id="{56e60ac9-0e96-2922-1665-ddd25988d123}">
           <p14:sldIdLst>
             <p14:sldId id="306"/>
             <p14:sldId id="307"/>
@@ -6756,8 +6756,8 @@
         </p:nvSpPr>
         <p:spPr>
           <a:xfrm>
-            <a:off x="548640" y="2560320"/>
-            <a:ext cx="9144000" cy="1097280"/>
+            <a:off x="548640" y="2514600"/>
+            <a:ext cx="10607040" cy="1828800"/>
           </a:xfrm>
           <a:prstGeom prst="rect">
             <a:avLst/>
@@ -6795,7 +6795,7 @@
         </p:nvSpPr>
         <p:spPr>
           <a:xfrm>
-            <a:off x="548640" y="3703320"/>
+            <a:off x="548640" y="4434840"/>
             <a:ext cx="8229600" cy="411480"/>
           </a:xfrm>
           <a:prstGeom prst="rect">
@@ -6831,7 +6831,7 @@
         </p:nvSpPr>
         <p:spPr>
           <a:xfrm>
-            <a:off x="548640" y="5120640"/>
+            <a:off x="548640" y="4983480"/>
             <a:ext cx="8229600" cy="365760"/>
           </a:xfrm>
           <a:prstGeom prst="rect">
@@ -54699,47 +54699,47 @@
 </file>
 
 <file path=ppt/theme/theme1.xml><?xml version="1.0" encoding="utf-8"?>
-<a:theme xmlns:a="http://schemas.openxmlformats.org/drawingml/2006/main" name="WLC Teal">
+<a:theme xmlns:a="http://schemas.openxmlformats.org/drawingml/2006/main" name="Office Theme">
   <a:themeElements>
-    <a:clrScheme name="WLC Teal">
+    <a:clrScheme name="Office">
       <a:dk1>
-        <a:srgbClr val="222222"/>
+        <a:sysClr val="windowText" lastClr="000000"/>
       </a:dk1>
       <a:lt1>
-        <a:srgbClr val="FFFFFF"/>
+        <a:sysClr val="window" lastClr="FFFFFF"/>
       </a:lt1>
       <a:dk2>
-        <a:srgbClr val="1F4E4A"/>
+        <a:srgbClr val="44546A"/>
       </a:dk2>
       <a:lt2>
-        <a:srgbClr val="EAF3F0"/>
+        <a:srgbClr val="E7E6E6"/>
       </a:lt2>
       <a:accent1>
-        <a:srgbClr val="2E7D6B"/>
+        <a:srgbClr val="4472C4"/>
       </a:accent1>
       <a:accent2>
-        <a:srgbClr val="D98E04"/>
+        <a:srgbClr val="ED7D31"/>
       </a:accent2>
       <a:accent3>
-        <a:srgbClr val="3A6EA5"/>
+        <a:srgbClr val="A5A5A5"/>
       </a:accent3>
       <a:accent4>
-        <a:srgbClr val="B5452F"/>
+        <a:srgbClr val="FFC000"/>
       </a:accent4>
       <a:accent5>
-        <a:srgbClr val="8FB9A8"/>
+        <a:srgbClr val="5B9BD5"/>
       </a:accent5>
       <a:accent6>
-        <a:srgbClr val="6B6B6B"/>
+        <a:srgbClr val="70AD47"/>
       </a:accent6>
       <a:hlink>
-        <a:srgbClr val="3A6EA5"/>
+        <a:srgbClr val="0563C1"/>
       </a:hlink>
       <a:folHlink>
-        <a:srgbClr val="1F4E4A"/>
+        <a:srgbClr val="954F72"/>
       </a:folHlink>
     </a:clrScheme>
-    <a:fontScheme name="WLC Teal">
+    <a:fontScheme name="Office">
       <a:majorFont>
         <a:latin typeface="Noto Serif KR Black"/>
         <a:ea typeface=""/>

--- a/ppt/out/WLC2급_제03강_웰빙·웰다잉·엔딩의통합철학과삶의설계.pptx
+++ b/ppt/out/WLC2급_제03강_웰빙·웰다잉·엔딩의통합철학과삶의설계.pptx
@@ -162,7 +162,7 @@
   <p:extLst>
     <p:ext uri="{521415D9-36F7-43E2-AB2F-B90AF26B5E84}">
       <p14:sectionLst xmlns:p14="http://schemas.microsoft.com/office/powerpoint/2010/main">
-        <p14:section name="열기" id="{ea99fcc2-c756-4011-e0fe-124fc50c23f0}">
+        <p14:section name="열기" id="{123d71c2-5745-992d-0153-c85cf34110f8}">
           <p14:sldIdLst>
             <p14:sldId id="256"/>
             <p14:sldId id="257"/>
@@ -175,7 +175,7 @@
             <p14:sldId id="264"/>
           </p14:sldIdLst>
         </p14:section>
-        <p14:section name="1교시 삶을 다시 읽다" id="{7918da37-e9b9-eefe-305b-d24476bb929a}">
+        <p14:section name="1교시 삶을 다시 읽다" id="{713a0103-c591-1108-3ac8-606fd8194690}">
           <p14:sldIdLst>
             <p14:sldId id="265"/>
             <p14:sldId id="266"/>
@@ -189,7 +189,7 @@
             <p14:sldId id="274"/>
           </p14:sldIdLst>
         </p14:section>
-        <p14:section name="2교시 후회에서 설계로" id="{8f091cbc-af66-0195-58f5-9b526f54e92e}">
+        <p14:section name="2교시 후회에서 설계로" id="{25a050e2-b660-142f-17f1-bb8be334744f}">
           <p14:sldIdLst>
             <p14:sldId id="275"/>
             <p14:sldId id="276"/>
@@ -208,7 +208,7 @@
             <p14:sldId id="289"/>
           </p14:sldIdLst>
         </p14:section>
-        <p14:section name="3교시 나의 남은 삶 설계" id="{e1d00015-9c0f-1013-fe34-c09ae5f6dfca}">
+        <p14:section name="3교시 나의 남은 삶 설계" id="{5a8405fa-ef29-565e-8afa-b96122acd707}">
           <p14:sldIdLst>
             <p14:sldId id="290"/>
             <p14:sldId id="291"/>
@@ -228,7 +228,7 @@
             <p14:sldId id="305"/>
           </p14:sldIdLst>
         </p14:section>
-        <p14:section name="정리와 예고" id="{56e60ac9-0e96-2922-1665-ddd25988d123}">
+        <p14:section name="정리와 예고" id="{e1fe8ec4-24b2-d60f-fa67-43567495f1de}">
           <p14:sldIdLst>
             <p14:sldId id="306"/>
             <p14:sldId id="307"/>
@@ -54699,47 +54699,47 @@
 </file>
 
 <file path=ppt/theme/theme1.xml><?xml version="1.0" encoding="utf-8"?>
-<a:theme xmlns:a="http://schemas.openxmlformats.org/drawingml/2006/main" name="Office Theme">
+<a:theme xmlns:a="http://schemas.openxmlformats.org/drawingml/2006/main" name="WLC Teal">
   <a:themeElements>
-    <a:clrScheme name="Office">
+    <a:clrScheme name="WLC Teal">
       <a:dk1>
-        <a:sysClr val="windowText" lastClr="000000"/>
+        <a:srgbClr val="222222"/>
       </a:dk1>
       <a:lt1>
-        <a:sysClr val="window" lastClr="FFFFFF"/>
+        <a:srgbClr val="FFFFFF"/>
       </a:lt1>
       <a:dk2>
-        <a:srgbClr val="44546A"/>
+        <a:srgbClr val="1F4E4A"/>
       </a:dk2>
       <a:lt2>
-        <a:srgbClr val="E7E6E6"/>
+        <a:srgbClr val="EAF3F0"/>
       </a:lt2>
       <a:accent1>
-        <a:srgbClr val="4472C4"/>
+        <a:srgbClr val="2E7D6B"/>
       </a:accent1>
       <a:accent2>
-        <a:srgbClr val="ED7D31"/>
+        <a:srgbClr val="D98E04"/>
       </a:accent2>
       <a:accent3>
-        <a:srgbClr val="A5A5A5"/>
+        <a:srgbClr val="3A6EA5"/>
       </a:accent3>
       <a:accent4>
-        <a:srgbClr val="FFC000"/>
+        <a:srgbClr val="B5452F"/>
       </a:accent4>
       <a:accent5>
-        <a:srgbClr val="5B9BD5"/>
+        <a:srgbClr val="8FB9A8"/>
       </a:accent5>
       <a:accent6>
-        <a:srgbClr val="70AD47"/>
+        <a:srgbClr val="6B6B6B"/>
       </a:accent6>
       <a:hlink>
-        <a:srgbClr val="0563C1"/>
+        <a:srgbClr val="3A6EA5"/>
       </a:hlink>
       <a:folHlink>
-        <a:srgbClr val="954F72"/>
+        <a:srgbClr val="1F4E4A"/>
       </a:folHlink>
     </a:clrScheme>
-    <a:fontScheme name="Office">
+    <a:fontScheme name="WLC Teal">
       <a:majorFont>
         <a:latin typeface="Noto Serif KR Black"/>
         <a:ea typeface=""/>
